--- a/examples/catalog-story/story.pptx
+++ b/examples/catalog-story/story.pptx
@@ -829,7 +829,7 @@
           </a:p>
           <a:p>
             <a:r>
-              <a:t>  "template_sha256": "97bcbcffe8e022bebf7228ab72dffc51be2532ed78194a5d9ae81a284f5e3ecb"</a:t>
+              <a:t>  "template_sha256": "031f71cd1210744b0311751268a345e5b7bd38372f5072d8d14e582778498bf5"</a:t>
             </a:r>
           </a:p>
           <a:p>
@@ -1719,7 +1719,7 @@
           </a:p>
           <a:p>
             <a:r>
-              <a:t>  "template_sha256": "2dc662754e058f5519a5303a025327453a6ed47570b919333e7eaf872e73f99c"</a:t>
+              <a:t>  "template_sha256": "fdfa721d34bbff4e176b9c780a3b24226e6c976de84583ae3ac9bf5733945955"</a:t>
             </a:r>
           </a:p>
           <a:p>
@@ -2409,7 +2409,7 @@
           </a:p>
           <a:p>
             <a:r>
-              <a:t>  "template_sha256": "f41d56a024b54cad4b3dfb014e9c3b29a6f3a66585af1f1b3ed73e01febfc8ab"</a:t>
+              <a:t>  "template_sha256": "fa4948b5bf5a43af39fb24b0a7f0e5d29c886d3346e9c4cfb7c845453ab43888"</a:t>
             </a:r>
           </a:p>
           <a:p>
